--- a/docs/APRESENTACAO-entorno-lojas.pptx
+++ b/docs/APRESENTACAO-entorno-lojas.pptx
@@ -3299,7 +3299,7 @@
           <a:p>
             <a:r>
               <a:rPr lang="en-US" dirty="0"/>
-              <a:t>Tudo o que está no Atlas é dado oficial. A ressalva importante é a do rodapé: o bloco de trabalho e pobreza é de 2010. Serve para comparar territórios entre si, não para dimensionar programas hoje.</a:t>
+              <a:t>Tudo o que está no Atlas vem de fonte oficial; o que é cálculo do próprio Atlas, como os números de 2010 tirados dos microdados do Censo, vem marcado como tal. São 479 unidades de saúde de atendimento: as centrais de regulação ficaram de fora e as comunidades terapêuticas estão numa camada própria. A ressalva importante é a do rodapé: o bloco de trabalho e pobreza é de 2010. Serve para comparar territórios entre si, não para dimensionar programas hoje.</a:t>
             </a:r>
             <a:endParaRPr lang="en-US" dirty="0"/>
           </a:p>
@@ -14236,7 +14236,7 @@
                 <a:ea typeface="Calibri" pitchFamily="34" charset="-122"/>
                 <a:cs typeface="Calibri" pitchFamily="34" charset="-120"/>
               </a:rPr>
-              <a:t>Sem fundamental: adultos de 25 anos ou mais, valor municipal oficial de 2010; na região, ponderado pela população de 2022. Assistência: despesa empenhada em 2024 (SICONFI) sobre a população estimada de 2026.</a:t>
+              <a:t>Sem fundamental: adultos de 25 anos ou mais, valor municipal de 2010 calculado pelo Atlas sobre os microdados do Censo; na região, ponderado pela população de 2022. Assistência: despesa empenhada em 2024 (SICONFI) sobre a população estimada de 2026.</a:t>
             </a:r>
             <a:endParaRPr lang="en-US" sz="1100" dirty="0"/>
           </a:p>
@@ -20803,7 +20803,7 @@
                 <a:ea typeface="Calibri" pitchFamily="34" charset="-122"/>
                 <a:cs typeface="Calibri" pitchFamily="34" charset="-120"/>
               </a:rPr>
-              <a:t>567</a:t>
+              <a:t>479</a:t>
             </a:r>
             <a:endParaRPr lang="en-US" sz="3200" dirty="0"/>
           </a:p>
@@ -20842,7 +20842,7 @@
                 <a:ea typeface="Calibri" pitchFamily="34" charset="-122"/>
                 <a:cs typeface="Calibri" pitchFamily="34" charset="-120"/>
               </a:rPr>
-              <a:t>estabelecimentos de saúde ativos, do CNES 2026</a:t>
+              <a:t>unidades de saúde de atendimento, do CNES 2026</a:t>
             </a:r>
             <a:endParaRPr lang="en-US" sz="1250" dirty="0"/>
           </a:p>
